--- a/Gestión/1.1.3 presentación Golden Burguer.pptx
+++ b/Gestión/1.1.3 presentación Golden Burguer.pptx
@@ -14710,7 +14710,7 @@
             <a:tbl>
               <a:tblPr>
                 <a:noFill/>
-                <a:tableStyleId>{B3C27986-58F8-4543-9804-BDDE433D57B7}</a:tableStyleId>
+                <a:tableStyleId>{58A7462A-9AB3-4804-A93D-835111CA1764}</a:tableStyleId>
               </a:tblPr>
               <a:tblGrid>
                 <a:gridCol w="1459200"/>
